--- a/word-drafts/figures/AAS-Fig9-Collections.pptx
+++ b/word-drafts/figures/AAS-Fig9-Collections.pptx
@@ -3637,7 +3637,7 @@
         <p:spPr>
           <a:xfrm>
             <a:off x="5238750" y="1228725"/>
-            <a:ext cx="485775" cy="123825"/>
+            <a:ext cx="609600" cy="123825"/>
           </a:xfrm>
           <a:prstGeom prst="rect">
             <a:avLst/>
@@ -3709,7 +3709,7 @@
         <p:spPr>
           <a:xfrm>
             <a:off x="6524625" y="1228725"/>
-            <a:ext cx="485775" cy="123825"/>
+            <a:ext cx="609600" cy="123825"/>
           </a:xfrm>
           <a:prstGeom prst="rect">
             <a:avLst/>
@@ -3781,7 +3781,7 @@
         <p:spPr>
           <a:xfrm>
             <a:off x="7810500" y="1228725"/>
-            <a:ext cx="495300" cy="123825"/>
+            <a:ext cx="619125" cy="123825"/>
           </a:xfrm>
           <a:prstGeom prst="rect">
             <a:avLst/>
@@ -3853,7 +3853,7 @@
         <p:spPr>
           <a:xfrm>
             <a:off x="2667000" y="2314575"/>
-            <a:ext cx="619125" cy="123825"/>
+            <a:ext cx="762000" cy="123825"/>
           </a:xfrm>
           <a:prstGeom prst="rect">
             <a:avLst/>
@@ -3925,7 +3925,7 @@
         <p:spPr>
           <a:xfrm>
             <a:off x="5238750" y="2314575"/>
-            <a:ext cx="619125" cy="123825"/>
+            <a:ext cx="762000" cy="123825"/>
           </a:xfrm>
           <a:prstGeom prst="rect">
             <a:avLst/>
@@ -4075,7 +4075,7 @@
         <p:spPr>
           <a:xfrm>
             <a:off x="5238750" y="2457450"/>
-            <a:ext cx="495300" cy="123825"/>
+            <a:ext cx="619125" cy="123825"/>
           </a:xfrm>
           <a:prstGeom prst="rect">
             <a:avLst/>
@@ -4147,7 +4147,7 @@
         <p:spPr>
           <a:xfrm>
             <a:off x="6524625" y="2314575"/>
-            <a:ext cx="495300" cy="123825"/>
+            <a:ext cx="619125" cy="123825"/>
           </a:xfrm>
           <a:prstGeom prst="rect">
             <a:avLst/>
@@ -4219,7 +4219,7 @@
         <p:spPr>
           <a:xfrm>
             <a:off x="7810500" y="2314575"/>
-            <a:ext cx="495300" cy="123825"/>
+            <a:ext cx="619125" cy="123825"/>
           </a:xfrm>
           <a:prstGeom prst="rect">
             <a:avLst/>
